--- a/media/resources/files/ButunSandardyJanaOnduktardyKoboytuuBoluu-10-100-1000-XOA_f1vJ6l3.pptx
+++ b/media/resources/files/ButunSandardyJanaOnduktardyKoboytuuBoluu-10-100-1000-XOA_f1vJ6l3.pptx
@@ -8365,7 +8365,7 @@
                 <a:ea typeface="+mn-ea"/>
                 <a:cs typeface="+mn-cs"/>
               </a:rPr>
-              <a:t>Турдуу пикирлер учун ыраазычылык билдиребиз.</a:t>
+              <a:t>Түрдүү пикирлер үчүн ыраазычылык билдиребиз.</a:t>
             </a:r>
           </a:p>
           <a:p>

--- a/media/resources/files/ButunSandardyJanaOnduktardyKoboytuuBoluu-10-100-1000-XOA_f1vJ6l3.pptx
+++ b/media/resources/files/ButunSandardyJanaOnduktardyKoboytuuBoluu-10-100-1000-XOA_f1vJ6l3.pptx
@@ -3949,7 +3949,7 @@
                 <a:ea typeface="+mn-ea"/>
                 <a:cs typeface="Arial" panose="020B0604020202020204" pitchFamily="34" charset="0"/>
               </a:rPr>
-              <a:t>Мугалим үчүн жооп баракчасы жана таратма материалдар камтылган.</a:t>
+              <a:t>Мугалим үчүн жооп барагы жана таратма материалдар бар.</a:t>
             </a:r>
           </a:p>
           <a:p>
@@ -4018,7 +4018,7 @@
                 <a:ea typeface="+mn-ea"/>
                 <a:cs typeface="Arial" panose="020B0604020202020204" pitchFamily="34" charset="0"/>
               </a:rPr>
-              <a:t>Кайсы команда туура жооп бергенине жараша '</a:t>
+              <a:t>Туура жооп берген командага жараша «</a:t>
             </a:r>
             <a:r>
               <a:rPr kumimoji="0" lang="en-GB" sz="2000" b="0" i="0" u="sng" strike="noStrike" kern="1200" cap="none" spc="0" normalizeH="0" baseline="0" noProof="0" dirty="0">
@@ -4035,7 +4035,7 @@
                 <a:ea typeface="+mn-ea"/>
                 <a:cs typeface="Arial" panose="020B0604020202020204" pitchFamily="34" charset="0"/>
               </a:rPr>
-              <a:t>X' </a:t>
+              <a:t>X» </a:t>
             </a:r>
             <a:r>
               <a:rPr kumimoji="0" lang="ru-RU" sz="2000" b="0" i="0" u="sng" strike="noStrike" kern="1200" cap="none" spc="0" normalizeH="0" baseline="0" noProof="0" dirty="0">
@@ -4052,7 +4052,7 @@
                 <a:ea typeface="+mn-ea"/>
                 <a:cs typeface="Arial" panose="020B0604020202020204" pitchFamily="34" charset="0"/>
               </a:rPr>
-              <a:t>же '</a:t>
+              <a:t>же «</a:t>
             </a:r>
             <a:r>
               <a:rPr kumimoji="0" lang="en-GB" sz="2000" b="0" i="0" u="sng" strike="noStrike" kern="1200" cap="none" spc="0" normalizeH="0" baseline="0" noProof="0" dirty="0">
@@ -4069,7 +4069,7 @@
                 <a:ea typeface="+mn-ea"/>
                 <a:cs typeface="Arial" panose="020B0604020202020204" pitchFamily="34" charset="0"/>
               </a:rPr>
-              <a:t>O' </a:t>
+              <a:t>O» </a:t>
             </a:r>
             <a:r>
               <a:rPr kumimoji="0" lang="ru-RU" sz="2000" b="0" i="0" u="sng" strike="noStrike" kern="1200" cap="none" spc="0" normalizeH="0" baseline="0" noProof="0" dirty="0">
@@ -4086,7 +4086,7 @@
                 <a:ea typeface="+mn-ea"/>
                 <a:cs typeface="Arial" panose="020B0604020202020204" pitchFamily="34" charset="0"/>
               </a:rPr>
-              <a:t>баскычын басыңыз/тийип коюңуз</a:t>
+              <a:t>баскычын басыңыз</a:t>
             </a:r>
             <a:r>
               <a:rPr kumimoji="0" lang="en-GB" sz="2000" b="0" i="0" u="none" strike="noStrike" kern="1200" cap="none" spc="0" normalizeH="0" baseline="0" noProof="0" dirty="0">
@@ -4654,7 +4654,7 @@
             <a:pPr algn="ctr"/>
             <a:r>
               <a:rPr lang="en-GB" sz="4000" dirty="0"/>
-              <a:t>7.2 × 100</a:t>
+              <a:t>7,2 × 100</a:t>
             </a:r>
           </a:p>
         </p:txBody>
@@ -4695,7 +4695,7 @@
             <a:pPr algn="ctr"/>
             <a:r>
               <a:rPr lang="en-GB" sz="4000" dirty="0"/>
-              <a:t>0.5 × 100</a:t>
+              <a:t>0,5 × 100</a:t>
             </a:r>
           </a:p>
         </p:txBody>
@@ -4736,7 +4736,7 @@
             <a:pPr algn="ctr"/>
             <a:r>
               <a:rPr lang="en-GB" sz="4000" dirty="0"/>
-              <a:t>0.17 × 1000</a:t>
+              <a:t>0,17 × 1000</a:t>
             </a:r>
           </a:p>
         </p:txBody>
@@ -4818,7 +4818,7 @@
             <a:pPr algn="ctr"/>
             <a:r>
               <a:rPr lang="en-GB" sz="4000" dirty="0"/>
-              <a:t>10.8 × 100</a:t>
+              <a:t>10,8 × 100</a:t>
             </a:r>
           </a:p>
         </p:txBody>
@@ -4900,7 +4900,7 @@
             <a:pPr algn="ctr"/>
             <a:r>
               <a:rPr lang="en-GB" sz="4000" dirty="0"/>
-              <a:t>5.1 × 1000</a:t>
+              <a:t>5,1 × 1000</a:t>
             </a:r>
           </a:p>
         </p:txBody>
